--- a/ゲーム科1年/00_前期/ゲームプログラミングⅠ/14_矩形と矩形の当たり判定.pptx
+++ b/ゲーム科1年/00_前期/ゲームプログラミングⅠ/14_矩形と矩形の当たり判定.pptx
@@ -269,7 +269,7 @@
           <a:p>
             <a:fld id="{E9CC885B-4903-4D54-9A93-00025F12DED9}" type="datetimeFigureOut">
               <a:rPr kumimoji="1" lang="ja-JP" altLang="en-US" smtClean="0"/>
-              <a:t>2024/12/4</a:t>
+              <a:t>2026/6/4</a:t>
             </a:fld>
             <a:endParaRPr kumimoji="1" lang="ja-JP" altLang="en-US"/>
           </a:p>
@@ -499,7 +499,7 @@
           <a:p>
             <a:fld id="{E9CC885B-4903-4D54-9A93-00025F12DED9}" type="datetimeFigureOut">
               <a:rPr kumimoji="1" lang="ja-JP" altLang="en-US" smtClean="0"/>
-              <a:t>2024/12/4</a:t>
+              <a:t>2026/6/4</a:t>
             </a:fld>
             <a:endParaRPr kumimoji="1" lang="ja-JP" altLang="en-US"/>
           </a:p>
@@ -739,7 +739,7 @@
           <a:p>
             <a:fld id="{E9CC885B-4903-4D54-9A93-00025F12DED9}" type="datetimeFigureOut">
               <a:rPr kumimoji="1" lang="ja-JP" altLang="en-US" smtClean="0"/>
-              <a:t>2024/12/4</a:t>
+              <a:t>2026/6/4</a:t>
             </a:fld>
             <a:endParaRPr kumimoji="1" lang="ja-JP" altLang="en-US"/>
           </a:p>
@@ -969,7 +969,7 @@
           <a:p>
             <a:fld id="{E9CC885B-4903-4D54-9A93-00025F12DED9}" type="datetimeFigureOut">
               <a:rPr kumimoji="1" lang="ja-JP" altLang="en-US" smtClean="0"/>
-              <a:t>2024/12/4</a:t>
+              <a:t>2026/6/4</a:t>
             </a:fld>
             <a:endParaRPr kumimoji="1" lang="ja-JP" altLang="en-US"/>
           </a:p>
@@ -1244,7 +1244,7 @@
           <a:p>
             <a:fld id="{E9CC885B-4903-4D54-9A93-00025F12DED9}" type="datetimeFigureOut">
               <a:rPr kumimoji="1" lang="ja-JP" altLang="en-US" smtClean="0"/>
-              <a:t>2024/12/4</a:t>
+              <a:t>2026/6/4</a:t>
             </a:fld>
             <a:endParaRPr kumimoji="1" lang="ja-JP" altLang="en-US"/>
           </a:p>
@@ -1573,7 +1573,7 @@
           <a:p>
             <a:fld id="{E9CC885B-4903-4D54-9A93-00025F12DED9}" type="datetimeFigureOut">
               <a:rPr kumimoji="1" lang="ja-JP" altLang="en-US" smtClean="0"/>
-              <a:t>2024/12/4</a:t>
+              <a:t>2026/6/4</a:t>
             </a:fld>
             <a:endParaRPr kumimoji="1" lang="ja-JP" altLang="en-US"/>
           </a:p>
@@ -2049,7 +2049,7 @@
           <a:p>
             <a:fld id="{E9CC885B-4903-4D54-9A93-00025F12DED9}" type="datetimeFigureOut">
               <a:rPr kumimoji="1" lang="ja-JP" altLang="en-US" smtClean="0"/>
-              <a:t>2024/12/4</a:t>
+              <a:t>2026/6/4</a:t>
             </a:fld>
             <a:endParaRPr kumimoji="1" lang="ja-JP" altLang="en-US"/>
           </a:p>
@@ -2190,7 +2190,7 @@
           <a:p>
             <a:fld id="{E9CC885B-4903-4D54-9A93-00025F12DED9}" type="datetimeFigureOut">
               <a:rPr kumimoji="1" lang="ja-JP" altLang="en-US" smtClean="0"/>
-              <a:t>2024/12/4</a:t>
+              <a:t>2026/6/4</a:t>
             </a:fld>
             <a:endParaRPr kumimoji="1" lang="ja-JP" altLang="en-US"/>
           </a:p>
@@ -2303,7 +2303,7 @@
           <a:p>
             <a:fld id="{E9CC885B-4903-4D54-9A93-00025F12DED9}" type="datetimeFigureOut">
               <a:rPr kumimoji="1" lang="ja-JP" altLang="en-US" smtClean="0"/>
-              <a:t>2024/12/4</a:t>
+              <a:t>2026/6/4</a:t>
             </a:fld>
             <a:endParaRPr kumimoji="1" lang="ja-JP" altLang="en-US"/>
           </a:p>
@@ -2646,7 +2646,7 @@
           <a:p>
             <a:fld id="{E9CC885B-4903-4D54-9A93-00025F12DED9}" type="datetimeFigureOut">
               <a:rPr kumimoji="1" lang="ja-JP" altLang="en-US" smtClean="0"/>
-              <a:t>2024/12/4</a:t>
+              <a:t>2026/6/4</a:t>
             </a:fld>
             <a:endParaRPr kumimoji="1" lang="ja-JP" altLang="en-US"/>
           </a:p>
@@ -2934,7 +2934,7 @@
           <a:p>
             <a:fld id="{E9CC885B-4903-4D54-9A93-00025F12DED9}" type="datetimeFigureOut">
               <a:rPr kumimoji="1" lang="ja-JP" altLang="en-US" smtClean="0"/>
-              <a:t>2024/12/4</a:t>
+              <a:t>2026/6/4</a:t>
             </a:fld>
             <a:endParaRPr kumimoji="1" lang="ja-JP" altLang="en-US"/>
           </a:p>
@@ -3207,7 +3207,7 @@
           <a:p>
             <a:fld id="{E9CC885B-4903-4D54-9A93-00025F12DED9}" type="datetimeFigureOut">
               <a:rPr kumimoji="1" lang="ja-JP" altLang="en-US" smtClean="0"/>
-              <a:t>2024/12/4</a:t>
+              <a:t>2026/6/4</a:t>
             </a:fld>
             <a:endParaRPr kumimoji="1" lang="ja-JP" altLang="en-US"/>
           </a:p>
@@ -4017,7 +4017,7 @@
         <p:spPr>
           <a:xfrm>
             <a:off x="567542" y="1216429"/>
-            <a:ext cx="6607899" cy="830997"/>
+            <a:ext cx="6729727" cy="830997"/>
           </a:xfrm>
           <a:prstGeom prst="rect">
             <a:avLst/>
@@ -4031,7 +4031,11 @@
           <a:lstStyle/>
           <a:p>
             <a:r>
-              <a:rPr kumimoji="1" lang="en-US" altLang="ja-JP" sz="2400" dirty="0"/>
+              <a:rPr kumimoji="1" lang="en-US" altLang="ja-JP" sz="2400" b="1" dirty="0">
+                <a:solidFill>
+                  <a:srgbClr val="FF0000"/>
+                </a:solidFill>
+              </a:rPr>
               <a:t>Collision.cpp</a:t>
             </a:r>
             <a:r>
@@ -4463,6 +4467,58 @@
           </a:prstGeom>
         </p:spPr>
       </p:pic>
+      <p:sp>
+        <p:nvSpPr>
+          <p:cNvPr id="2" name="正方形/長方形 1">
+            <a:extLst>
+              <a:ext uri="{FF2B5EF4-FFF2-40B4-BE49-F238E27FC236}">
+                <a16:creationId xmlns:a16="http://schemas.microsoft.com/office/drawing/2014/main" id="{FFB8BF6F-D4F5-428E-A196-1CCB33C780D0}"/>
+              </a:ext>
+            </a:extLst>
+          </p:cNvPr>
+          <p:cNvSpPr/>
+          <p:nvPr/>
+        </p:nvSpPr>
+        <p:spPr>
+          <a:xfrm>
+            <a:off x="948267" y="2370667"/>
+            <a:ext cx="11099800" cy="499533"/>
+          </a:xfrm>
+          <a:prstGeom prst="rect">
+            <a:avLst/>
+          </a:prstGeom>
+          <a:noFill/>
+          <a:ln w="38100">
+            <a:solidFill>
+              <a:srgbClr val="FF0000"/>
+            </a:solidFill>
+          </a:ln>
+        </p:spPr>
+        <p:style>
+          <a:lnRef idx="2">
+            <a:schemeClr val="accent1">
+              <a:shade val="50000"/>
+            </a:schemeClr>
+          </a:lnRef>
+          <a:fillRef idx="1">
+            <a:schemeClr val="accent1"/>
+          </a:fillRef>
+          <a:effectRef idx="0">
+            <a:schemeClr val="accent1"/>
+          </a:effectRef>
+          <a:fontRef idx="minor">
+            <a:schemeClr val="lt1"/>
+          </a:fontRef>
+        </p:style>
+        <p:txBody>
+          <a:bodyPr rtlCol="0" anchor="ctr"/>
+          <a:lstStyle/>
+          <a:p>
+            <a:pPr algn="ctr"/>
+            <a:endParaRPr kumimoji="1" lang="ja-JP" altLang="en-US"/>
+          </a:p>
+        </p:txBody>
+      </p:sp>
     </p:spTree>
     <p:extLst>
       <p:ext uri="{BB962C8B-B14F-4D97-AF65-F5344CB8AC3E}">

--- a/ゲーム科1年/00_前期/ゲームプログラミングⅠ/14_矩形と矩形の当たり判定.pptx
+++ b/ゲーム科1年/00_前期/ゲームプログラミングⅠ/14_矩形と矩形の当たり判定.pptx
@@ -269,7 +269,7 @@
           <a:p>
             <a:fld id="{E9CC885B-4903-4D54-9A93-00025F12DED9}" type="datetimeFigureOut">
               <a:rPr kumimoji="1" lang="ja-JP" altLang="en-US" smtClean="0"/>
-              <a:t>2026/6/4</a:t>
+              <a:t>2026/6/22</a:t>
             </a:fld>
             <a:endParaRPr kumimoji="1" lang="ja-JP" altLang="en-US"/>
           </a:p>
@@ -499,7 +499,7 @@
           <a:p>
             <a:fld id="{E9CC885B-4903-4D54-9A93-00025F12DED9}" type="datetimeFigureOut">
               <a:rPr kumimoji="1" lang="ja-JP" altLang="en-US" smtClean="0"/>
-              <a:t>2026/6/4</a:t>
+              <a:t>2026/6/22</a:t>
             </a:fld>
             <a:endParaRPr kumimoji="1" lang="ja-JP" altLang="en-US"/>
           </a:p>
@@ -739,7 +739,7 @@
           <a:p>
             <a:fld id="{E9CC885B-4903-4D54-9A93-00025F12DED9}" type="datetimeFigureOut">
               <a:rPr kumimoji="1" lang="ja-JP" altLang="en-US" smtClean="0"/>
-              <a:t>2026/6/4</a:t>
+              <a:t>2026/6/22</a:t>
             </a:fld>
             <a:endParaRPr kumimoji="1" lang="ja-JP" altLang="en-US"/>
           </a:p>
@@ -969,7 +969,7 @@
           <a:p>
             <a:fld id="{E9CC885B-4903-4D54-9A93-00025F12DED9}" type="datetimeFigureOut">
               <a:rPr kumimoji="1" lang="ja-JP" altLang="en-US" smtClean="0"/>
-              <a:t>2026/6/4</a:t>
+              <a:t>2026/6/22</a:t>
             </a:fld>
             <a:endParaRPr kumimoji="1" lang="ja-JP" altLang="en-US"/>
           </a:p>
@@ -1244,7 +1244,7 @@
           <a:p>
             <a:fld id="{E9CC885B-4903-4D54-9A93-00025F12DED9}" type="datetimeFigureOut">
               <a:rPr kumimoji="1" lang="ja-JP" altLang="en-US" smtClean="0"/>
-              <a:t>2026/6/4</a:t>
+              <a:t>2026/6/22</a:t>
             </a:fld>
             <a:endParaRPr kumimoji="1" lang="ja-JP" altLang="en-US"/>
           </a:p>
@@ -1573,7 +1573,7 @@
           <a:p>
             <a:fld id="{E9CC885B-4903-4D54-9A93-00025F12DED9}" type="datetimeFigureOut">
               <a:rPr kumimoji="1" lang="ja-JP" altLang="en-US" smtClean="0"/>
-              <a:t>2026/6/4</a:t>
+              <a:t>2026/6/22</a:t>
             </a:fld>
             <a:endParaRPr kumimoji="1" lang="ja-JP" altLang="en-US"/>
           </a:p>
@@ -2049,7 +2049,7 @@
           <a:p>
             <a:fld id="{E9CC885B-4903-4D54-9A93-00025F12DED9}" type="datetimeFigureOut">
               <a:rPr kumimoji="1" lang="ja-JP" altLang="en-US" smtClean="0"/>
-              <a:t>2026/6/4</a:t>
+              <a:t>2026/6/22</a:t>
             </a:fld>
             <a:endParaRPr kumimoji="1" lang="ja-JP" altLang="en-US"/>
           </a:p>
@@ -2190,7 +2190,7 @@
           <a:p>
             <a:fld id="{E9CC885B-4903-4D54-9A93-00025F12DED9}" type="datetimeFigureOut">
               <a:rPr kumimoji="1" lang="ja-JP" altLang="en-US" smtClean="0"/>
-              <a:t>2026/6/4</a:t>
+              <a:t>2026/6/22</a:t>
             </a:fld>
             <a:endParaRPr kumimoji="1" lang="ja-JP" altLang="en-US"/>
           </a:p>
@@ -2303,7 +2303,7 @@
           <a:p>
             <a:fld id="{E9CC885B-4903-4D54-9A93-00025F12DED9}" type="datetimeFigureOut">
               <a:rPr kumimoji="1" lang="ja-JP" altLang="en-US" smtClean="0"/>
-              <a:t>2026/6/4</a:t>
+              <a:t>2026/6/22</a:t>
             </a:fld>
             <a:endParaRPr kumimoji="1" lang="ja-JP" altLang="en-US"/>
           </a:p>
@@ -2646,7 +2646,7 @@
           <a:p>
             <a:fld id="{E9CC885B-4903-4D54-9A93-00025F12DED9}" type="datetimeFigureOut">
               <a:rPr kumimoji="1" lang="ja-JP" altLang="en-US" smtClean="0"/>
-              <a:t>2026/6/4</a:t>
+              <a:t>2026/6/22</a:t>
             </a:fld>
             <a:endParaRPr kumimoji="1" lang="ja-JP" altLang="en-US"/>
           </a:p>
@@ -2934,7 +2934,7 @@
           <a:p>
             <a:fld id="{E9CC885B-4903-4D54-9A93-00025F12DED9}" type="datetimeFigureOut">
               <a:rPr kumimoji="1" lang="ja-JP" altLang="en-US" smtClean="0"/>
-              <a:t>2026/6/4</a:t>
+              <a:t>2026/6/22</a:t>
             </a:fld>
             <a:endParaRPr kumimoji="1" lang="ja-JP" altLang="en-US"/>
           </a:p>
@@ -3207,7 +3207,7 @@
           <a:p>
             <a:fld id="{E9CC885B-4903-4D54-9A93-00025F12DED9}" type="datetimeFigureOut">
               <a:rPr kumimoji="1" lang="ja-JP" altLang="en-US" smtClean="0"/>
-              <a:t>2026/6/4</a:t>
+              <a:t>2026/6/22</a:t>
             </a:fld>
             <a:endParaRPr kumimoji="1" lang="ja-JP" altLang="en-US"/>
           </a:p>
@@ -7203,7 +7203,7 @@
         <p:spPr>
           <a:xfrm>
             <a:off x="567542" y="1216429"/>
-            <a:ext cx="9365064" cy="461665"/>
+            <a:ext cx="9459641" cy="461665"/>
           </a:xfrm>
           <a:prstGeom prst="rect">
             <a:avLst/>
@@ -7217,7 +7217,11 @@
           <a:lstStyle/>
           <a:p>
             <a:r>
-              <a:rPr kumimoji="1" lang="en-US" altLang="ja-JP" sz="2400" dirty="0"/>
+              <a:rPr kumimoji="1" lang="en-US" altLang="ja-JP" sz="2400" b="1" dirty="0">
+                <a:solidFill>
+                  <a:srgbClr val="FF0000"/>
+                </a:solidFill>
+              </a:rPr>
               <a:t>Player.cpp</a:t>
             </a:r>
             <a:r>

--- a/ゲーム科1年/00_前期/ゲームプログラミングⅠ/14_矩形と矩形の当たり判定.pptx
+++ b/ゲーム科1年/00_前期/ゲームプログラミングⅠ/14_矩形と矩形の当たり判定.pptx
@@ -269,7 +269,7 @@
           <a:p>
             <a:fld id="{E9CC885B-4903-4D54-9A93-00025F12DED9}" type="datetimeFigureOut">
               <a:rPr kumimoji="1" lang="ja-JP" altLang="en-US" smtClean="0"/>
-              <a:t>2026/6/22</a:t>
+              <a:t>2026/7/2</a:t>
             </a:fld>
             <a:endParaRPr kumimoji="1" lang="ja-JP" altLang="en-US"/>
           </a:p>
@@ -499,7 +499,7 @@
           <a:p>
             <a:fld id="{E9CC885B-4903-4D54-9A93-00025F12DED9}" type="datetimeFigureOut">
               <a:rPr kumimoji="1" lang="ja-JP" altLang="en-US" smtClean="0"/>
-              <a:t>2026/6/22</a:t>
+              <a:t>2026/7/2</a:t>
             </a:fld>
             <a:endParaRPr kumimoji="1" lang="ja-JP" altLang="en-US"/>
           </a:p>
@@ -739,7 +739,7 @@
           <a:p>
             <a:fld id="{E9CC885B-4903-4D54-9A93-00025F12DED9}" type="datetimeFigureOut">
               <a:rPr kumimoji="1" lang="ja-JP" altLang="en-US" smtClean="0"/>
-              <a:t>2026/6/22</a:t>
+              <a:t>2026/7/2</a:t>
             </a:fld>
             <a:endParaRPr kumimoji="1" lang="ja-JP" altLang="en-US"/>
           </a:p>
@@ -969,7 +969,7 @@
           <a:p>
             <a:fld id="{E9CC885B-4903-4D54-9A93-00025F12DED9}" type="datetimeFigureOut">
               <a:rPr kumimoji="1" lang="ja-JP" altLang="en-US" smtClean="0"/>
-              <a:t>2026/6/22</a:t>
+              <a:t>2026/7/2</a:t>
             </a:fld>
             <a:endParaRPr kumimoji="1" lang="ja-JP" altLang="en-US"/>
           </a:p>
@@ -1244,7 +1244,7 @@
           <a:p>
             <a:fld id="{E9CC885B-4903-4D54-9A93-00025F12DED9}" type="datetimeFigureOut">
               <a:rPr kumimoji="1" lang="ja-JP" altLang="en-US" smtClean="0"/>
-              <a:t>2026/6/22</a:t>
+              <a:t>2026/7/2</a:t>
             </a:fld>
             <a:endParaRPr kumimoji="1" lang="ja-JP" altLang="en-US"/>
           </a:p>
@@ -1573,7 +1573,7 @@
           <a:p>
             <a:fld id="{E9CC885B-4903-4D54-9A93-00025F12DED9}" type="datetimeFigureOut">
               <a:rPr kumimoji="1" lang="ja-JP" altLang="en-US" smtClean="0"/>
-              <a:t>2026/6/22</a:t>
+              <a:t>2026/7/2</a:t>
             </a:fld>
             <a:endParaRPr kumimoji="1" lang="ja-JP" altLang="en-US"/>
           </a:p>
@@ -2049,7 +2049,7 @@
           <a:p>
             <a:fld id="{E9CC885B-4903-4D54-9A93-00025F12DED9}" type="datetimeFigureOut">
               <a:rPr kumimoji="1" lang="ja-JP" altLang="en-US" smtClean="0"/>
-              <a:t>2026/6/22</a:t>
+              <a:t>2026/7/2</a:t>
             </a:fld>
             <a:endParaRPr kumimoji="1" lang="ja-JP" altLang="en-US"/>
           </a:p>
@@ -2190,7 +2190,7 @@
           <a:p>
             <a:fld id="{E9CC885B-4903-4D54-9A93-00025F12DED9}" type="datetimeFigureOut">
               <a:rPr kumimoji="1" lang="ja-JP" altLang="en-US" smtClean="0"/>
-              <a:t>2026/6/22</a:t>
+              <a:t>2026/7/2</a:t>
             </a:fld>
             <a:endParaRPr kumimoji="1" lang="ja-JP" altLang="en-US"/>
           </a:p>
@@ -2303,7 +2303,7 @@
           <a:p>
             <a:fld id="{E9CC885B-4903-4D54-9A93-00025F12DED9}" type="datetimeFigureOut">
               <a:rPr kumimoji="1" lang="ja-JP" altLang="en-US" smtClean="0"/>
-              <a:t>2026/6/22</a:t>
+              <a:t>2026/7/2</a:t>
             </a:fld>
             <a:endParaRPr kumimoji="1" lang="ja-JP" altLang="en-US"/>
           </a:p>
@@ -2646,7 +2646,7 @@
           <a:p>
             <a:fld id="{E9CC885B-4903-4D54-9A93-00025F12DED9}" type="datetimeFigureOut">
               <a:rPr kumimoji="1" lang="ja-JP" altLang="en-US" smtClean="0"/>
-              <a:t>2026/6/22</a:t>
+              <a:t>2026/7/2</a:t>
             </a:fld>
             <a:endParaRPr kumimoji="1" lang="ja-JP" altLang="en-US"/>
           </a:p>
@@ -2934,7 +2934,7 @@
           <a:p>
             <a:fld id="{E9CC885B-4903-4D54-9A93-00025F12DED9}" type="datetimeFigureOut">
               <a:rPr kumimoji="1" lang="ja-JP" altLang="en-US" smtClean="0"/>
-              <a:t>2026/6/22</a:t>
+              <a:t>2026/7/2</a:t>
             </a:fld>
             <a:endParaRPr kumimoji="1" lang="ja-JP" altLang="en-US"/>
           </a:p>
@@ -3207,7 +3207,7 @@
           <a:p>
             <a:fld id="{E9CC885B-4903-4D54-9A93-00025F12DED9}" type="datetimeFigureOut">
               <a:rPr kumimoji="1" lang="ja-JP" altLang="en-US" smtClean="0"/>
-              <a:t>2026/6/22</a:t>
+              <a:t>2026/7/2</a:t>
             </a:fld>
             <a:endParaRPr kumimoji="1" lang="ja-JP" altLang="en-US"/>
           </a:p>
@@ -3783,7 +3783,7 @@
         <p:spPr>
           <a:xfrm>
             <a:off x="567542" y="491954"/>
-            <a:ext cx="5636479" cy="584775"/>
+            <a:ext cx="4815742" cy="584775"/>
           </a:xfrm>
           <a:prstGeom prst="rect">
             <a:avLst/>
@@ -3798,13 +3798,8 @@
           <a:p>
             <a:r>
               <a:rPr kumimoji="1" lang="ja-JP" altLang="en-US" sz="3200" b="1" u="sng" dirty="0"/>
-              <a:t>矩形と矩形の当たり判定 </a:t>
-            </a:r>
-            <a:r>
-              <a:rPr lang="ja-JP" altLang="en-US" sz="3200" b="1" u="sng" dirty="0"/>
-              <a:t>問題</a:t>
-            </a:r>
-            <a:endParaRPr kumimoji="1" lang="ja-JP" altLang="en-US" sz="3200" b="1" u="sng" dirty="0"/>
+              <a:t>矩形と矩形の当たり判定</a:t>
+            </a:r>
           </a:p>
         </p:txBody>
       </p:sp>
@@ -3977,7 +3972,7 @@
         <p:spPr>
           <a:xfrm>
             <a:off x="567542" y="491954"/>
-            <a:ext cx="5636479" cy="584775"/>
+            <a:ext cx="4815742" cy="584775"/>
           </a:xfrm>
           <a:prstGeom prst="rect">
             <a:avLst/>
@@ -3992,11 +3987,11 @@
           <a:p>
             <a:r>
               <a:rPr kumimoji="1" lang="ja-JP" altLang="en-US" sz="3200" b="1" u="sng" dirty="0"/>
-              <a:t>矩形と矩形の当たり判定 </a:t>
-            </a:r>
-            <a:r>
-              <a:rPr lang="ja-JP" altLang="en-US" sz="3200" b="1" u="sng" dirty="0"/>
-              <a:t>問題</a:t>
+              <a:t>矩形と矩形の</a:t>
+            </a:r>
+            <a:r>
+              <a:rPr kumimoji="1" lang="ja-JP" altLang="en-US" sz="3200" b="1" u="sng"/>
+              <a:t>当たり判定</a:t>
             </a:r>
             <a:endParaRPr kumimoji="1" lang="ja-JP" altLang="en-US" sz="3200" b="1" u="sng" dirty="0"/>
           </a:p>
@@ -6942,7 +6937,7 @@
         <p:spPr>
           <a:xfrm>
             <a:off x="567542" y="491954"/>
-            <a:ext cx="5636479" cy="584775"/>
+            <a:ext cx="4815742" cy="584775"/>
           </a:xfrm>
           <a:prstGeom prst="rect">
             <a:avLst/>
@@ -6957,13 +6952,8 @@
           <a:p>
             <a:r>
               <a:rPr kumimoji="1" lang="ja-JP" altLang="en-US" sz="3200" b="1" u="sng" dirty="0"/>
-              <a:t>矩形と矩形の当たり判定 </a:t>
-            </a:r>
-            <a:r>
-              <a:rPr lang="ja-JP" altLang="en-US" sz="3200" b="1" u="sng" dirty="0"/>
-              <a:t>問題</a:t>
-            </a:r>
-            <a:endParaRPr kumimoji="1" lang="ja-JP" altLang="en-US" sz="3200" b="1" u="sng" dirty="0"/>
+              <a:t>矩形と矩形の当たり判定</a:t>
+            </a:r>
           </a:p>
         </p:txBody>
       </p:sp>
@@ -7163,7 +7153,7 @@
         <p:spPr>
           <a:xfrm>
             <a:off x="567542" y="491954"/>
-            <a:ext cx="5636479" cy="584775"/>
+            <a:ext cx="4815742" cy="584775"/>
           </a:xfrm>
           <a:prstGeom prst="rect">
             <a:avLst/>
@@ -7178,13 +7168,8 @@
           <a:p>
             <a:r>
               <a:rPr kumimoji="1" lang="ja-JP" altLang="en-US" sz="3200" b="1" u="sng" dirty="0"/>
-              <a:t>矩形と矩形の当たり判定 </a:t>
-            </a:r>
-            <a:r>
-              <a:rPr lang="ja-JP" altLang="en-US" sz="3200" b="1" u="sng" dirty="0"/>
-              <a:t>問題</a:t>
-            </a:r>
-            <a:endParaRPr kumimoji="1" lang="ja-JP" altLang="en-US" sz="3200" b="1" u="sng" dirty="0"/>
+              <a:t>矩形と矩形の当たり判定</a:t>
+            </a:r>
           </a:p>
         </p:txBody>
       </p:sp>
